--- a/backend-django/backend_deployment.pptx
+++ b/backend-django/backend_deployment.pptx
@@ -5,20 +5,20 @@
     <p:sldMasterId id="2147483648" r:id="rId1"/>
   </p:sldMasterIdLst>
   <p:sldIdLst>
-    <p:sldId id="256" r:id="rId7"/>
-    <p:sldId id="257" r:id="rId8"/>
-    <p:sldId id="258" r:id="rId9"/>
-    <p:sldId id="259" r:id="rId10"/>
-    <p:sldId id="260" r:id="rId11"/>
-    <p:sldId id="261" r:id="rId12"/>
-    <p:sldId id="262" r:id="rId13"/>
-    <p:sldId id="263" r:id="rId14"/>
-    <p:sldId id="264" r:id="rId15"/>
-    <p:sldId id="265" r:id="rId16"/>
-    <p:sldId id="266" r:id="rId17"/>
-    <p:sldId id="267" r:id="rId18"/>
+    <p:sldId id="256" r:id="rId2"/>
+    <p:sldId id="257" r:id="rId3"/>
+    <p:sldId id="258" r:id="rId4"/>
+    <p:sldId id="259" r:id="rId5"/>
+    <p:sldId id="260" r:id="rId6"/>
+    <p:sldId id="261" r:id="rId7"/>
+    <p:sldId id="262" r:id="rId8"/>
+    <p:sldId id="263" r:id="rId9"/>
+    <p:sldId id="264" r:id="rId10"/>
+    <p:sldId id="265" r:id="rId11"/>
+    <p:sldId id="266" r:id="rId12"/>
+    <p:sldId id="267" r:id="rId13"/>
   </p:sldIdLst>
-  <p:sldSz cx="12191695" cy="6858000" type="screen4x3"/>
+  <p:sldSz cx="12192000" cy="6858000"/>
   <p:notesSz cx="6858000" cy="9144000"/>
   <p:defaultTextStyle>
     <a:defPPr>
@@ -115,6 +115,22 @@
       </a:defRPr>
     </a:lvl9pPr>
   </p:defaultTextStyle>
+  <p:extLst>
+    <p:ext uri="{EFAFB233-063F-42B5-8137-9DF3F51BA10A}">
+      <p15:sldGuideLst xmlns:p15="http://schemas.microsoft.com/office/powerpoint/2012/main">
+        <p15:guide id="1" orient="horz" pos="2160">
+          <p15:clr>
+            <a:srgbClr val="A4A3A4"/>
+          </p15:clr>
+        </p15:guide>
+        <p15:guide id="2" pos="2880">
+          <p15:clr>
+            <a:srgbClr val="A4A3A4"/>
+          </p15:clr>
+        </p15:guide>
+      </p15:sldGuideLst>
+    </p:ext>
+  </p:extLst>
 </p:presentation>
 </file>
 
@@ -156,10 +172,9 @@
           <a:lstStyle/>
           <a:p>
             <a:r>
-              <a:rPr lang="en-US" smtClean="0"/>
+              <a:rPr lang="en-US"/>
               <a:t>Click to edit Master title style</a:t>
             </a:r>
-            <a:endParaRPr lang="en-US"/>
           </a:p>
         </p:txBody>
       </p:sp>
@@ -275,10 +290,9 @@
           </a:lstStyle>
           <a:p>
             <a:r>
-              <a:rPr lang="en-US" smtClean="0"/>
+              <a:rPr lang="en-US"/>
               <a:t>Click to edit Master subtitle style</a:t>
             </a:r>
-            <a:endParaRPr lang="en-US"/>
           </a:p>
         </p:txBody>
       </p:sp>
@@ -299,7 +313,7 @@
           <a:p>
             <a:fld id="{5BCAD085-E8A6-8845-BD4E-CB4CCA059FC4}" type="datetimeFigureOut">
               <a:rPr lang="en-US" smtClean="0"/>
-              <a:t>1/27/13</a:t>
+              <a:t>6/17/2026</a:t>
             </a:fld>
             <a:endParaRPr lang="en-US"/>
           </a:p>
@@ -393,10 +407,9 @@
           <a:lstStyle/>
           <a:p>
             <a:r>
-              <a:rPr lang="en-US" smtClean="0"/>
+              <a:rPr lang="en-US"/>
               <a:t>Click to edit Master title style</a:t>
             </a:r>
-            <a:endParaRPr lang="en-US"/>
           </a:p>
         </p:txBody>
       </p:sp>
@@ -417,38 +430,37 @@
           <a:p>
             <a:pPr lvl="0"/>
             <a:r>
-              <a:rPr lang="en-US" smtClean="0"/>
+              <a:rPr lang="en-US"/>
               <a:t>Click to edit Master text styles</a:t>
             </a:r>
           </a:p>
           <a:p>
             <a:pPr lvl="1"/>
             <a:r>
-              <a:rPr lang="en-US" smtClean="0"/>
+              <a:rPr lang="en-US"/>
               <a:t>Second level</a:t>
             </a:r>
           </a:p>
           <a:p>
             <a:pPr lvl="2"/>
             <a:r>
-              <a:rPr lang="en-US" smtClean="0"/>
+              <a:rPr lang="en-US"/>
               <a:t>Third level</a:t>
             </a:r>
           </a:p>
           <a:p>
             <a:pPr lvl="3"/>
             <a:r>
-              <a:rPr lang="en-US" smtClean="0"/>
+              <a:rPr lang="en-US"/>
               <a:t>Fourth level</a:t>
             </a:r>
           </a:p>
           <a:p>
             <a:pPr lvl="4"/>
             <a:r>
-              <a:rPr lang="en-US" smtClean="0"/>
+              <a:rPr lang="en-US"/>
               <a:t>Fifth level</a:t>
             </a:r>
-            <a:endParaRPr lang="en-US"/>
           </a:p>
         </p:txBody>
       </p:sp>
@@ -469,7 +481,7 @@
           <a:p>
             <a:fld id="{5BCAD085-E8A6-8845-BD4E-CB4CCA059FC4}" type="datetimeFigureOut">
               <a:rPr lang="en-US" smtClean="0"/>
-              <a:t>1/27/13</a:t>
+              <a:t>6/17/2026</a:t>
             </a:fld>
             <a:endParaRPr lang="en-US"/>
           </a:p>
@@ -568,10 +580,9 @@
           <a:lstStyle/>
           <a:p>
             <a:r>
-              <a:rPr lang="en-US" smtClean="0"/>
+              <a:rPr lang="en-US"/>
               <a:t>Click to edit Master title style</a:t>
             </a:r>
-            <a:endParaRPr lang="en-US"/>
           </a:p>
         </p:txBody>
       </p:sp>
@@ -597,38 +608,37 @@
           <a:p>
             <a:pPr lvl="0"/>
             <a:r>
-              <a:rPr lang="en-US" smtClean="0"/>
+              <a:rPr lang="en-US"/>
               <a:t>Click to edit Master text styles</a:t>
             </a:r>
           </a:p>
           <a:p>
             <a:pPr lvl="1"/>
             <a:r>
-              <a:rPr lang="en-US" smtClean="0"/>
+              <a:rPr lang="en-US"/>
               <a:t>Second level</a:t>
             </a:r>
           </a:p>
           <a:p>
             <a:pPr lvl="2"/>
             <a:r>
-              <a:rPr lang="en-US" smtClean="0"/>
+              <a:rPr lang="en-US"/>
               <a:t>Third level</a:t>
             </a:r>
           </a:p>
           <a:p>
             <a:pPr lvl="3"/>
             <a:r>
-              <a:rPr lang="en-US" smtClean="0"/>
+              <a:rPr lang="en-US"/>
               <a:t>Fourth level</a:t>
             </a:r>
           </a:p>
           <a:p>
             <a:pPr lvl="4"/>
             <a:r>
-              <a:rPr lang="en-US" smtClean="0"/>
+              <a:rPr lang="en-US"/>
               <a:t>Fifth level</a:t>
             </a:r>
-            <a:endParaRPr lang="en-US"/>
           </a:p>
         </p:txBody>
       </p:sp>
@@ -649,7 +659,7 @@
           <a:p>
             <a:fld id="{5BCAD085-E8A6-8845-BD4E-CB4CCA059FC4}" type="datetimeFigureOut">
               <a:rPr lang="en-US" smtClean="0"/>
-              <a:t>1/27/13</a:t>
+              <a:t>6/17/2026</a:t>
             </a:fld>
             <a:endParaRPr lang="en-US"/>
           </a:p>
@@ -743,10 +753,9 @@
           <a:lstStyle/>
           <a:p>
             <a:r>
-              <a:rPr lang="en-US" smtClean="0"/>
+              <a:rPr lang="en-US"/>
               <a:t>Click to edit Master title style</a:t>
             </a:r>
-            <a:endParaRPr lang="en-US"/>
           </a:p>
         </p:txBody>
       </p:sp>
@@ -767,38 +776,37 @@
           <a:p>
             <a:pPr lvl="0"/>
             <a:r>
-              <a:rPr lang="en-US" smtClean="0"/>
+              <a:rPr lang="en-US"/>
               <a:t>Click to edit Master text styles</a:t>
             </a:r>
           </a:p>
           <a:p>
             <a:pPr lvl="1"/>
             <a:r>
-              <a:rPr lang="en-US" smtClean="0"/>
+              <a:rPr lang="en-US"/>
               <a:t>Second level</a:t>
             </a:r>
           </a:p>
           <a:p>
             <a:pPr lvl="2"/>
             <a:r>
-              <a:rPr lang="en-US" smtClean="0"/>
+              <a:rPr lang="en-US"/>
               <a:t>Third level</a:t>
             </a:r>
           </a:p>
           <a:p>
             <a:pPr lvl="3"/>
             <a:r>
-              <a:rPr lang="en-US" smtClean="0"/>
+              <a:rPr lang="en-US"/>
               <a:t>Fourth level</a:t>
             </a:r>
           </a:p>
           <a:p>
             <a:pPr lvl="4"/>
             <a:r>
-              <a:rPr lang="en-US" smtClean="0"/>
+              <a:rPr lang="en-US"/>
               <a:t>Fifth level</a:t>
             </a:r>
-            <a:endParaRPr lang="en-US"/>
           </a:p>
         </p:txBody>
       </p:sp>
@@ -819,7 +827,7 @@
           <a:p>
             <a:fld id="{5BCAD085-E8A6-8845-BD4E-CB4CCA059FC4}" type="datetimeFigureOut">
               <a:rPr lang="en-US" smtClean="0"/>
-              <a:t>1/27/13</a:t>
+              <a:t>6/17/2026</a:t>
             </a:fld>
             <a:endParaRPr lang="en-US"/>
           </a:p>
@@ -922,10 +930,9 @@
           </a:lstStyle>
           <a:p>
             <a:r>
-              <a:rPr lang="en-US" smtClean="0"/>
+              <a:rPr lang="en-US"/>
               <a:t>Click to edit Master title style</a:t>
             </a:r>
-            <a:endParaRPr lang="en-US"/>
           </a:p>
         </p:txBody>
       </p:sp>
@@ -1042,7 +1049,7 @@
           <a:p>
             <a:pPr lvl="0"/>
             <a:r>
-              <a:rPr lang="en-US" smtClean="0"/>
+              <a:rPr lang="en-US"/>
               <a:t>Click to edit Master text styles</a:t>
             </a:r>
           </a:p>
@@ -1065,7 +1072,7 @@
           <a:p>
             <a:fld id="{5BCAD085-E8A6-8845-BD4E-CB4CCA059FC4}" type="datetimeFigureOut">
               <a:rPr lang="en-US" smtClean="0"/>
-              <a:t>1/27/13</a:t>
+              <a:t>6/17/2026</a:t>
             </a:fld>
             <a:endParaRPr lang="en-US"/>
           </a:p>
@@ -1159,10 +1166,9 @@
           <a:lstStyle/>
           <a:p>
             <a:r>
-              <a:rPr lang="en-US" smtClean="0"/>
+              <a:rPr lang="en-US"/>
               <a:t>Click to edit Master title style</a:t>
             </a:r>
-            <a:endParaRPr lang="en-US"/>
           </a:p>
         </p:txBody>
       </p:sp>
@@ -1216,38 +1222,37 @@
           <a:p>
             <a:pPr lvl="0"/>
             <a:r>
-              <a:rPr lang="en-US" smtClean="0"/>
+              <a:rPr lang="en-US"/>
               <a:t>Click to edit Master text styles</a:t>
             </a:r>
           </a:p>
           <a:p>
             <a:pPr lvl="1"/>
             <a:r>
-              <a:rPr lang="en-US" smtClean="0"/>
+              <a:rPr lang="en-US"/>
               <a:t>Second level</a:t>
             </a:r>
           </a:p>
           <a:p>
             <a:pPr lvl="2"/>
             <a:r>
-              <a:rPr lang="en-US" smtClean="0"/>
+              <a:rPr lang="en-US"/>
               <a:t>Third level</a:t>
             </a:r>
           </a:p>
           <a:p>
             <a:pPr lvl="3"/>
             <a:r>
-              <a:rPr lang="en-US" smtClean="0"/>
+              <a:rPr lang="en-US"/>
               <a:t>Fourth level</a:t>
             </a:r>
           </a:p>
           <a:p>
             <a:pPr lvl="4"/>
             <a:r>
-              <a:rPr lang="en-US" smtClean="0"/>
+              <a:rPr lang="en-US"/>
               <a:t>Fifth level</a:t>
             </a:r>
-            <a:endParaRPr lang="en-US"/>
           </a:p>
         </p:txBody>
       </p:sp>
@@ -1301,38 +1306,37 @@
           <a:p>
             <a:pPr lvl="0"/>
             <a:r>
-              <a:rPr lang="en-US" smtClean="0"/>
+              <a:rPr lang="en-US"/>
               <a:t>Click to edit Master text styles</a:t>
             </a:r>
           </a:p>
           <a:p>
             <a:pPr lvl="1"/>
             <a:r>
-              <a:rPr lang="en-US" smtClean="0"/>
+              <a:rPr lang="en-US"/>
               <a:t>Second level</a:t>
             </a:r>
           </a:p>
           <a:p>
             <a:pPr lvl="2"/>
             <a:r>
-              <a:rPr lang="en-US" smtClean="0"/>
+              <a:rPr lang="en-US"/>
               <a:t>Third level</a:t>
             </a:r>
           </a:p>
           <a:p>
             <a:pPr lvl="3"/>
             <a:r>
-              <a:rPr lang="en-US" smtClean="0"/>
+              <a:rPr lang="en-US"/>
               <a:t>Fourth level</a:t>
             </a:r>
           </a:p>
           <a:p>
             <a:pPr lvl="4"/>
             <a:r>
-              <a:rPr lang="en-US" smtClean="0"/>
+              <a:rPr lang="en-US"/>
               <a:t>Fifth level</a:t>
             </a:r>
-            <a:endParaRPr lang="en-US"/>
           </a:p>
         </p:txBody>
       </p:sp>
@@ -1353,7 +1357,7 @@
           <a:p>
             <a:fld id="{5BCAD085-E8A6-8845-BD4E-CB4CCA059FC4}" type="datetimeFigureOut">
               <a:rPr lang="en-US" smtClean="0"/>
-              <a:t>1/27/13</a:t>
+              <a:t>6/17/2026</a:t>
             </a:fld>
             <a:endParaRPr lang="en-US"/>
           </a:p>
@@ -1451,10 +1455,9 @@
           </a:lstStyle>
           <a:p>
             <a:r>
-              <a:rPr lang="en-US" smtClean="0"/>
+              <a:rPr lang="en-US"/>
               <a:t>Click to edit Master title style</a:t>
             </a:r>
-            <a:endParaRPr lang="en-US"/>
           </a:p>
         </p:txBody>
       </p:sp>
@@ -1517,7 +1520,7 @@
           <a:p>
             <a:pPr lvl="0"/>
             <a:r>
-              <a:rPr lang="en-US" smtClean="0"/>
+              <a:rPr lang="en-US"/>
               <a:t>Click to edit Master text styles</a:t>
             </a:r>
           </a:p>
@@ -1573,38 +1576,37 @@
           <a:p>
             <a:pPr lvl="0"/>
             <a:r>
-              <a:rPr lang="en-US" smtClean="0"/>
+              <a:rPr lang="en-US"/>
               <a:t>Click to edit Master text styles</a:t>
             </a:r>
           </a:p>
           <a:p>
             <a:pPr lvl="1"/>
             <a:r>
-              <a:rPr lang="en-US" smtClean="0"/>
+              <a:rPr lang="en-US"/>
               <a:t>Second level</a:t>
             </a:r>
           </a:p>
           <a:p>
             <a:pPr lvl="2"/>
             <a:r>
-              <a:rPr lang="en-US" smtClean="0"/>
+              <a:rPr lang="en-US"/>
               <a:t>Third level</a:t>
             </a:r>
           </a:p>
           <a:p>
             <a:pPr lvl="3"/>
             <a:r>
-              <a:rPr lang="en-US" smtClean="0"/>
+              <a:rPr lang="en-US"/>
               <a:t>Fourth level</a:t>
             </a:r>
           </a:p>
           <a:p>
             <a:pPr lvl="4"/>
             <a:r>
-              <a:rPr lang="en-US" smtClean="0"/>
+              <a:rPr lang="en-US"/>
               <a:t>Fifth level</a:t>
             </a:r>
-            <a:endParaRPr lang="en-US"/>
           </a:p>
         </p:txBody>
       </p:sp>
@@ -1667,7 +1669,7 @@
           <a:p>
             <a:pPr lvl="0"/>
             <a:r>
-              <a:rPr lang="en-US" smtClean="0"/>
+              <a:rPr lang="en-US"/>
               <a:t>Click to edit Master text styles</a:t>
             </a:r>
           </a:p>
@@ -1723,38 +1725,37 @@
           <a:p>
             <a:pPr lvl="0"/>
             <a:r>
-              <a:rPr lang="en-US" smtClean="0"/>
+              <a:rPr lang="en-US"/>
               <a:t>Click to edit Master text styles</a:t>
             </a:r>
           </a:p>
           <a:p>
             <a:pPr lvl="1"/>
             <a:r>
-              <a:rPr lang="en-US" smtClean="0"/>
+              <a:rPr lang="en-US"/>
               <a:t>Second level</a:t>
             </a:r>
           </a:p>
           <a:p>
             <a:pPr lvl="2"/>
             <a:r>
-              <a:rPr lang="en-US" smtClean="0"/>
+              <a:rPr lang="en-US"/>
               <a:t>Third level</a:t>
             </a:r>
           </a:p>
           <a:p>
             <a:pPr lvl="3"/>
             <a:r>
-              <a:rPr lang="en-US" smtClean="0"/>
+              <a:rPr lang="en-US"/>
               <a:t>Fourth level</a:t>
             </a:r>
           </a:p>
           <a:p>
             <a:pPr lvl="4"/>
             <a:r>
-              <a:rPr lang="en-US" smtClean="0"/>
+              <a:rPr lang="en-US"/>
               <a:t>Fifth level</a:t>
             </a:r>
-            <a:endParaRPr lang="en-US"/>
           </a:p>
         </p:txBody>
       </p:sp>
@@ -1775,7 +1776,7 @@
           <a:p>
             <a:fld id="{5BCAD085-E8A6-8845-BD4E-CB4CCA059FC4}" type="datetimeFigureOut">
               <a:rPr lang="en-US" smtClean="0"/>
-              <a:t>1/27/13</a:t>
+              <a:t>6/17/2026</a:t>
             </a:fld>
             <a:endParaRPr lang="en-US"/>
           </a:p>
@@ -1869,10 +1870,9 @@
           <a:lstStyle/>
           <a:p>
             <a:r>
-              <a:rPr lang="en-US" smtClean="0"/>
+              <a:rPr lang="en-US"/>
               <a:t>Click to edit Master title style</a:t>
             </a:r>
-            <a:endParaRPr lang="en-US"/>
           </a:p>
         </p:txBody>
       </p:sp>
@@ -1893,7 +1893,7 @@
           <a:p>
             <a:fld id="{5BCAD085-E8A6-8845-BD4E-CB4CCA059FC4}" type="datetimeFigureOut">
               <a:rPr lang="en-US" smtClean="0"/>
-              <a:t>1/27/13</a:t>
+              <a:t>6/17/2026</a:t>
             </a:fld>
             <a:endParaRPr lang="en-US"/>
           </a:p>
@@ -1988,7 +1988,7 @@
           <a:p>
             <a:fld id="{5BCAD085-E8A6-8845-BD4E-CB4CCA059FC4}" type="datetimeFigureOut">
               <a:rPr lang="en-US" smtClean="0"/>
-              <a:t>1/27/13</a:t>
+              <a:t>6/17/2026</a:t>
             </a:fld>
             <a:endParaRPr lang="en-US"/>
           </a:p>
@@ -2091,10 +2091,9 @@
           </a:lstStyle>
           <a:p>
             <a:r>
-              <a:rPr lang="en-US" smtClean="0"/>
+              <a:rPr lang="en-US"/>
               <a:t>Click to edit Master title style</a:t>
             </a:r>
-            <a:endParaRPr lang="en-US"/>
           </a:p>
         </p:txBody>
       </p:sp>
@@ -2148,38 +2147,37 @@
           <a:p>
             <a:pPr lvl="0"/>
             <a:r>
-              <a:rPr lang="en-US" smtClean="0"/>
+              <a:rPr lang="en-US"/>
               <a:t>Click to edit Master text styles</a:t>
             </a:r>
           </a:p>
           <a:p>
             <a:pPr lvl="1"/>
             <a:r>
-              <a:rPr lang="en-US" smtClean="0"/>
+              <a:rPr lang="en-US"/>
               <a:t>Second level</a:t>
             </a:r>
           </a:p>
           <a:p>
             <a:pPr lvl="2"/>
             <a:r>
-              <a:rPr lang="en-US" smtClean="0"/>
+              <a:rPr lang="en-US"/>
               <a:t>Third level</a:t>
             </a:r>
           </a:p>
           <a:p>
             <a:pPr lvl="3"/>
             <a:r>
-              <a:rPr lang="en-US" smtClean="0"/>
+              <a:rPr lang="en-US"/>
               <a:t>Fourth level</a:t>
             </a:r>
           </a:p>
           <a:p>
             <a:pPr lvl="4"/>
             <a:r>
-              <a:rPr lang="en-US" smtClean="0"/>
+              <a:rPr lang="en-US"/>
               <a:t>Fifth level</a:t>
             </a:r>
-            <a:endParaRPr lang="en-US"/>
           </a:p>
         </p:txBody>
       </p:sp>
@@ -2242,7 +2240,7 @@
           <a:p>
             <a:pPr lvl="0"/>
             <a:r>
-              <a:rPr lang="en-US" smtClean="0"/>
+              <a:rPr lang="en-US"/>
               <a:t>Click to edit Master text styles</a:t>
             </a:r>
           </a:p>
@@ -2265,7 +2263,7 @@
           <a:p>
             <a:fld id="{5BCAD085-E8A6-8845-BD4E-CB4CCA059FC4}" type="datetimeFigureOut">
               <a:rPr lang="en-US" smtClean="0"/>
-              <a:t>1/27/13</a:t>
+              <a:t>6/17/2026</a:t>
             </a:fld>
             <a:endParaRPr lang="en-US"/>
           </a:p>
@@ -2368,10 +2366,9 @@
           </a:lstStyle>
           <a:p>
             <a:r>
-              <a:rPr lang="en-US" smtClean="0"/>
+              <a:rPr lang="en-US"/>
               <a:t>Click to edit Master title style</a:t>
             </a:r>
-            <a:endParaRPr lang="en-US"/>
           </a:p>
         </p:txBody>
       </p:sp>
@@ -2495,7 +2492,7 @@
           <a:p>
             <a:pPr lvl="0"/>
             <a:r>
-              <a:rPr lang="en-US" smtClean="0"/>
+              <a:rPr lang="en-US"/>
               <a:t>Click to edit Master text styles</a:t>
             </a:r>
           </a:p>
@@ -2518,7 +2515,7 @@
           <a:p>
             <a:fld id="{5BCAD085-E8A6-8845-BD4E-CB4CCA059FC4}" type="datetimeFigureOut">
               <a:rPr lang="en-US" smtClean="0"/>
-              <a:t>1/27/13</a:t>
+              <a:t>6/17/2026</a:t>
             </a:fld>
             <a:endParaRPr lang="en-US"/>
           </a:p>
@@ -2627,10 +2624,9 @@
           <a:lstStyle/>
           <a:p>
             <a:r>
-              <a:rPr lang="en-US" smtClean="0"/>
+              <a:rPr lang="en-US"/>
               <a:t>Click to edit Master title style</a:t>
             </a:r>
-            <a:endParaRPr lang="en-US"/>
           </a:p>
         </p:txBody>
       </p:sp>
@@ -2661,38 +2657,37 @@
           <a:p>
             <a:pPr lvl="0"/>
             <a:r>
-              <a:rPr lang="en-US" smtClean="0"/>
+              <a:rPr lang="en-US"/>
               <a:t>Click to edit Master text styles</a:t>
             </a:r>
           </a:p>
           <a:p>
             <a:pPr lvl="1"/>
             <a:r>
-              <a:rPr lang="en-US" smtClean="0"/>
+              <a:rPr lang="en-US"/>
               <a:t>Second level</a:t>
             </a:r>
           </a:p>
           <a:p>
             <a:pPr lvl="2"/>
             <a:r>
-              <a:rPr lang="en-US" smtClean="0"/>
+              <a:rPr lang="en-US"/>
               <a:t>Third level</a:t>
             </a:r>
           </a:p>
           <a:p>
             <a:pPr lvl="3"/>
             <a:r>
-              <a:rPr lang="en-US" smtClean="0"/>
+              <a:rPr lang="en-US"/>
               <a:t>Fourth level</a:t>
             </a:r>
           </a:p>
           <a:p>
             <a:pPr lvl="4"/>
             <a:r>
-              <a:rPr lang="en-US" smtClean="0"/>
+              <a:rPr lang="en-US"/>
               <a:t>Fifth level</a:t>
             </a:r>
-            <a:endParaRPr lang="en-US"/>
           </a:p>
         </p:txBody>
       </p:sp>
@@ -2731,7 +2726,7 @@
           <a:p>
             <a:fld id="{5BCAD085-E8A6-8845-BD4E-CB4CCA059FC4}" type="datetimeFigureOut">
               <a:rPr lang="en-US" smtClean="0"/>
-              <a:t>1/27/13</a:t>
+              <a:t>6/17/2026</a:t>
             </a:fld>
             <a:endParaRPr lang="en-US"/>
           </a:p>
@@ -3090,7 +3085,7 @@
 </file>
 
 <file path=ppt/slides/slide1.xml><?xml version="1.0" encoding="utf-8"?>
-<p:sld xmlns:a="http://schemas.openxmlformats.org/drawingml/2006/main" xmlns:p="http://schemas.openxmlformats.org/presentationml/2006/main" xmlns:r="http://schemas.openxmlformats.org/officeDocument/2006/relationships">
+<p:sld xmlns:a="http://schemas.openxmlformats.org/drawingml/2006/main" xmlns:r="http://schemas.openxmlformats.org/officeDocument/2006/relationships" xmlns:p="http://schemas.openxmlformats.org/presentationml/2006/main">
   <p:cSld>
     <p:bg>
       <p:bgPr>
@@ -3106,7 +3101,14 @@
         <p:cNvGrpSpPr/>
         <p:nvPr/>
       </p:nvGrpSpPr>
-      <p:grpSpPr/>
+      <p:grpSpPr>
+        <a:xfrm>
+          <a:off x="0" y="0"/>
+          <a:ext cx="0" cy="0"/>
+          <a:chOff x="0" y="0"/>
+          <a:chExt cx="0" cy="0"/>
+        </a:xfrm>
+      </p:grpSpPr>
       <p:sp>
         <p:nvSpPr>
           <p:cNvPr id="2" name="TextBox 1"/>
@@ -3130,7 +3132,7 @@
           <a:lstStyle/>
           <a:p>
             <a:pPr algn="l">
-              <a:defRPr b="1" sz="4400">
+              <a:defRPr sz="4400" b="1">
                 <a:solidFill>
                   <a:srgbClr val="009688"/>
                 </a:solidFill>
@@ -3145,6 +3147,7 @@
             <a:pPr>
               <a:defRPr sz="1400"/>
             </a:pPr>
+            <a:endParaRPr/>
           </a:p>
           <a:p>
             <a:pPr algn="l">
@@ -3170,7 +3173,7 @@
 </file>
 
 <file path=ppt/slides/slide10.xml><?xml version="1.0" encoding="utf-8"?>
-<p:sld xmlns:a="http://schemas.openxmlformats.org/drawingml/2006/main" xmlns:p="http://schemas.openxmlformats.org/presentationml/2006/main" xmlns:r="http://schemas.openxmlformats.org/officeDocument/2006/relationships">
+<p:sld xmlns:a="http://schemas.openxmlformats.org/drawingml/2006/main" xmlns:r="http://schemas.openxmlformats.org/officeDocument/2006/relationships" xmlns:p="http://schemas.openxmlformats.org/presentationml/2006/main">
   <p:cSld>
     <p:bg>
       <p:bgPr>
@@ -3186,7 +3189,14 @@
         <p:cNvGrpSpPr/>
         <p:nvPr/>
       </p:nvGrpSpPr>
-      <p:grpSpPr/>
+      <p:grpSpPr>
+        <a:xfrm>
+          <a:off x="0" y="0"/>
+          <a:ext cx="0" cy="0"/>
+          <a:chOff x="0" y="0"/>
+          <a:chExt cx="0" cy="0"/>
+        </a:xfrm>
+      </p:grpSpPr>
       <p:sp>
         <p:nvSpPr>
           <p:cNvPr id="2" name="Rectangle 1"/>
@@ -3229,6 +3239,7 @@
           <a:lstStyle/>
           <a:p>
             <a:pPr algn="ctr"/>
+            <a:endParaRPr/>
           </a:p>
         </p:txBody>
       </p:sp>
@@ -3255,7 +3266,7 @@
           <a:lstStyle/>
           <a:p>
             <a:pPr>
-              <a:defRPr b="1" sz="1400">
+              <a:defRPr sz="1400" b="1">
                 <a:solidFill>
                   <a:srgbClr val="009688"/>
                 </a:solidFill>
@@ -3291,7 +3302,7 @@
           <a:lstStyle/>
           <a:p>
             <a:pPr>
-              <a:defRPr b="1" sz="2800">
+              <a:defRPr sz="2800" b="1">
                 <a:solidFill>
                   <a:srgbClr val="142030"/>
                 </a:solidFill>
@@ -3416,7 +3427,7 @@
 </file>
 
 <file path=ppt/slides/slide11.xml><?xml version="1.0" encoding="utf-8"?>
-<p:sld xmlns:a="http://schemas.openxmlformats.org/drawingml/2006/main" xmlns:p="http://schemas.openxmlformats.org/presentationml/2006/main" xmlns:r="http://schemas.openxmlformats.org/officeDocument/2006/relationships">
+<p:sld xmlns:a="http://schemas.openxmlformats.org/drawingml/2006/main" xmlns:r="http://schemas.openxmlformats.org/officeDocument/2006/relationships" xmlns:p="http://schemas.openxmlformats.org/presentationml/2006/main">
   <p:cSld>
     <p:bg>
       <p:bgPr>
@@ -3432,7 +3443,14 @@
         <p:cNvGrpSpPr/>
         <p:nvPr/>
       </p:nvGrpSpPr>
-      <p:grpSpPr/>
+      <p:grpSpPr>
+        <a:xfrm>
+          <a:off x="0" y="0"/>
+          <a:ext cx="0" cy="0"/>
+          <a:chOff x="0" y="0"/>
+          <a:chExt cx="0" cy="0"/>
+        </a:xfrm>
+      </p:grpSpPr>
       <p:sp>
         <p:nvSpPr>
           <p:cNvPr id="2" name="Rectangle 1"/>
@@ -3475,6 +3493,7 @@
           <a:lstStyle/>
           <a:p>
             <a:pPr algn="ctr"/>
+            <a:endParaRPr/>
           </a:p>
         </p:txBody>
       </p:sp>
@@ -3501,7 +3520,7 @@
           <a:lstStyle/>
           <a:p>
             <a:pPr>
-              <a:defRPr b="1" sz="1400">
+              <a:defRPr sz="1400" b="1">
                 <a:solidFill>
                   <a:srgbClr val="009688"/>
                 </a:solidFill>
@@ -3537,7 +3556,7 @@
           <a:lstStyle/>
           <a:p>
             <a:pPr>
-              <a:defRPr b="1" sz="2800">
+              <a:defRPr sz="2800" b="1">
                 <a:solidFill>
                   <a:srgbClr val="142030"/>
                 </a:solidFill>
@@ -3662,7 +3681,7 @@
 </file>
 
 <file path=ppt/slides/slide12.xml><?xml version="1.0" encoding="utf-8"?>
-<p:sld xmlns:a="http://schemas.openxmlformats.org/drawingml/2006/main" xmlns:p="http://schemas.openxmlformats.org/presentationml/2006/main" xmlns:r="http://schemas.openxmlformats.org/officeDocument/2006/relationships">
+<p:sld xmlns:a="http://schemas.openxmlformats.org/drawingml/2006/main" xmlns:r="http://schemas.openxmlformats.org/officeDocument/2006/relationships" xmlns:p="http://schemas.openxmlformats.org/presentationml/2006/main">
   <p:cSld>
     <p:bg>
       <p:bgPr>
@@ -3678,7 +3697,14 @@
         <p:cNvGrpSpPr/>
         <p:nvPr/>
       </p:nvGrpSpPr>
-      <p:grpSpPr/>
+      <p:grpSpPr>
+        <a:xfrm>
+          <a:off x="0" y="0"/>
+          <a:ext cx="0" cy="0"/>
+          <a:chOff x="0" y="0"/>
+          <a:chExt cx="0" cy="0"/>
+        </a:xfrm>
+      </p:grpSpPr>
       <p:sp>
         <p:nvSpPr>
           <p:cNvPr id="2" name="Rectangle 1"/>
@@ -3721,6 +3747,7 @@
           <a:lstStyle/>
           <a:p>
             <a:pPr algn="ctr"/>
+            <a:endParaRPr/>
           </a:p>
         </p:txBody>
       </p:sp>
@@ -3747,7 +3774,7 @@
           <a:lstStyle/>
           <a:p>
             <a:pPr>
-              <a:defRPr b="1" sz="1400">
+              <a:defRPr sz="1400" b="1">
                 <a:solidFill>
                   <a:srgbClr val="009688"/>
                 </a:solidFill>
@@ -3783,7 +3810,7 @@
           <a:lstStyle/>
           <a:p>
             <a:pPr>
-              <a:defRPr b="1" sz="2800">
+              <a:defRPr sz="2800" b="1">
                 <a:solidFill>
                   <a:srgbClr val="142030"/>
                 </a:solidFill>
@@ -3908,7 +3935,7 @@
 </file>
 
 <file path=ppt/slides/slide2.xml><?xml version="1.0" encoding="utf-8"?>
-<p:sld xmlns:a="http://schemas.openxmlformats.org/drawingml/2006/main" xmlns:p="http://schemas.openxmlformats.org/presentationml/2006/main" xmlns:r="http://schemas.openxmlformats.org/officeDocument/2006/relationships">
+<p:sld xmlns:a="http://schemas.openxmlformats.org/drawingml/2006/main" xmlns:r="http://schemas.openxmlformats.org/officeDocument/2006/relationships" xmlns:p="http://schemas.openxmlformats.org/presentationml/2006/main">
   <p:cSld>
     <p:bg>
       <p:bgPr>
@@ -3924,7 +3951,14 @@
         <p:cNvGrpSpPr/>
         <p:nvPr/>
       </p:nvGrpSpPr>
-      <p:grpSpPr/>
+      <p:grpSpPr>
+        <a:xfrm>
+          <a:off x="0" y="0"/>
+          <a:ext cx="0" cy="0"/>
+          <a:chOff x="0" y="0"/>
+          <a:chExt cx="0" cy="0"/>
+        </a:xfrm>
+      </p:grpSpPr>
       <p:sp>
         <p:nvSpPr>
           <p:cNvPr id="2" name="Rectangle 1"/>
@@ -3967,6 +4001,7 @@
           <a:lstStyle/>
           <a:p>
             <a:pPr algn="ctr"/>
+            <a:endParaRPr/>
           </a:p>
         </p:txBody>
       </p:sp>
@@ -3993,7 +4028,7 @@
           <a:lstStyle/>
           <a:p>
             <a:pPr>
-              <a:defRPr b="1" sz="1400">
+              <a:defRPr sz="1400" b="1">
                 <a:solidFill>
                   <a:srgbClr val="009688"/>
                 </a:solidFill>
@@ -4029,7 +4064,7 @@
           <a:lstStyle/>
           <a:p>
             <a:pPr>
-              <a:defRPr b="1" sz="2800">
+              <a:defRPr sz="2800" b="1">
                 <a:solidFill>
                   <a:srgbClr val="142030"/>
                 </a:solidFill>
@@ -4138,7 +4173,7 @@
 </file>
 
 <file path=ppt/slides/slide3.xml><?xml version="1.0" encoding="utf-8"?>
-<p:sld xmlns:a="http://schemas.openxmlformats.org/drawingml/2006/main" xmlns:p="http://schemas.openxmlformats.org/presentationml/2006/main" xmlns:r="http://schemas.openxmlformats.org/officeDocument/2006/relationships">
+<p:sld xmlns:a="http://schemas.openxmlformats.org/drawingml/2006/main" xmlns:r="http://schemas.openxmlformats.org/officeDocument/2006/relationships" xmlns:p="http://schemas.openxmlformats.org/presentationml/2006/main">
   <p:cSld>
     <p:bg>
       <p:bgPr>
@@ -4154,7 +4189,14 @@
         <p:cNvGrpSpPr/>
         <p:nvPr/>
       </p:nvGrpSpPr>
-      <p:grpSpPr/>
+      <p:grpSpPr>
+        <a:xfrm>
+          <a:off x="0" y="0"/>
+          <a:ext cx="0" cy="0"/>
+          <a:chOff x="0" y="0"/>
+          <a:chExt cx="0" cy="0"/>
+        </a:xfrm>
+      </p:grpSpPr>
       <p:sp>
         <p:nvSpPr>
           <p:cNvPr id="2" name="Rectangle 1"/>
@@ -4197,6 +4239,7 @@
           <a:lstStyle/>
           <a:p>
             <a:pPr algn="ctr"/>
+            <a:endParaRPr/>
           </a:p>
         </p:txBody>
       </p:sp>
@@ -4223,7 +4266,7 @@
           <a:lstStyle/>
           <a:p>
             <a:pPr>
-              <a:defRPr b="1" sz="1400">
+              <a:defRPr sz="1400" b="1">
                 <a:solidFill>
                   <a:srgbClr val="009688"/>
                 </a:solidFill>
@@ -4259,7 +4302,7 @@
           <a:lstStyle/>
           <a:p>
             <a:pPr>
-              <a:defRPr b="1" sz="2800">
+              <a:defRPr sz="2800" b="1">
                 <a:solidFill>
                   <a:srgbClr val="142030"/>
                 </a:solidFill>
@@ -4281,7 +4324,7 @@
         <p:spPr>
           <a:xfrm>
             <a:off x="914400" y="1645920"/>
-            <a:ext cx="10360152" cy="4572000"/>
+            <a:ext cx="10360152" cy="1918474"/>
           </a:xfrm>
           <a:prstGeom prst="rect">
             <a:avLst/>
@@ -4306,8 +4349,85 @@
               </a:defRPr>
             </a:pPr>
             <a:r>
-              <a:t>•  Establish SSH connection to the server:   $ ssh -i &lt;key&gt; ubuntu@your_server_ip</a:t>
-            </a:r>
+              <a:rPr dirty="0"/>
+              <a:t>•  Establish SSH connection to the server:   $ ssh -</a:t>
+            </a:r>
+            <a:r>
+              <a:rPr dirty="0" err="1"/>
+              <a:t>i</a:t>
+            </a:r>
+            <a:r>
+              <a:rPr dirty="0"/>
+              <a:t> &lt;key&gt; </a:t>
+            </a:r>
+            <a:r>
+              <a:rPr dirty="0" err="1"/>
+              <a:t>ubuntu@your_server_ip</a:t>
+            </a:r>
+            <a:endParaRPr lang="en-US" dirty="0"/>
+          </a:p>
+          <a:p>
+            <a:pPr>
+              <a:spcAft>
+                <a:spcPts val="1400"/>
+              </a:spcAft>
+              <a:defRPr sz="1400">
+                <a:solidFill>
+                  <a:srgbClr val="1E293B"/>
+                </a:solidFill>
+                <a:latin typeface="Courier New"/>
+              </a:defRPr>
+            </a:pPr>
+            <a:r>
+              <a:rPr lang="en-US" b="1" dirty="0"/>
+              <a:t>• Check first is that installed </a:t>
+            </a:r>
+            <a:r>
+              <a:rPr lang="en-US" b="1" dirty="0" err="1"/>
+              <a:t>postgress</a:t>
+            </a:r>
+            <a:r>
+              <a:rPr lang="en-US" b="1" dirty="0"/>
+              <a:t> or not :</a:t>
+            </a:r>
+          </a:p>
+          <a:p>
+            <a:pPr>
+              <a:spcAft>
+                <a:spcPts val="1400"/>
+              </a:spcAft>
+              <a:defRPr sz="1400">
+                <a:solidFill>
+                  <a:srgbClr val="1E293B"/>
+                </a:solidFill>
+                <a:latin typeface="Courier New"/>
+              </a:defRPr>
+            </a:pPr>
+            <a:r>
+              <a:rPr lang="en-US" dirty="0"/>
+              <a:t>$ </a:t>
+            </a:r>
+            <a:r>
+              <a:rPr lang="en-US" dirty="0" err="1"/>
+              <a:t>sudo</a:t>
+            </a:r>
+            <a:r>
+              <a:rPr lang="en-US" dirty="0"/>
+              <a:t> </a:t>
+            </a:r>
+            <a:r>
+              <a:rPr lang="en-US" dirty="0" err="1"/>
+              <a:t>systemctl</a:t>
+            </a:r>
+            <a:r>
+              <a:rPr lang="en-US" dirty="0"/>
+              <a:t> status </a:t>
+            </a:r>
+            <a:r>
+              <a:rPr lang="en-US" dirty="0" err="1"/>
+              <a:t>postgress</a:t>
+            </a:r>
+            <a:endParaRPr lang="en-US" b="1" dirty="0"/>
           </a:p>
           <a:p>
             <a:pPr>
@@ -4322,7 +4442,16 @@
               </a:defRPr>
             </a:pPr>
             <a:r>
-              <a:t>•  Update packages and install PostgreSQL plus database compiler dependencies:</a:t>
+              <a:rPr dirty="0"/>
+              <a:t>•  Update packages and install PostgreSQL plus database compiler dependencies</a:t>
+            </a:r>
+            <a:r>
+              <a:rPr lang="en-US" dirty="0"/>
+              <a:t> if not installed</a:t>
+            </a:r>
+            <a:r>
+              <a:rPr dirty="0"/>
+              <a:t>:</a:t>
             </a:r>
           </a:p>
           <a:p>
@@ -4338,7 +4467,40 @@
               </a:defRPr>
             </a:pPr>
             <a:r>
-              <a:t>•    $ sudo apt update &amp;&amp; sudo apt install postgresql postgresql-contrib -y</a:t>
+              <a:rPr dirty="0"/>
+              <a:t>•    $ </a:t>
+            </a:r>
+            <a:r>
+              <a:rPr dirty="0" err="1"/>
+              <a:t>sudo</a:t>
+            </a:r>
+            <a:r>
+              <a:rPr dirty="0"/>
+              <a:t> apt update &amp;&amp; </a:t>
+            </a:r>
+            <a:r>
+              <a:rPr dirty="0" err="1"/>
+              <a:t>sudo</a:t>
+            </a:r>
+            <a:r>
+              <a:rPr dirty="0"/>
+              <a:t> apt install </a:t>
+            </a:r>
+            <a:r>
+              <a:rPr dirty="0" err="1"/>
+              <a:t>postgresql</a:t>
+            </a:r>
+            <a:r>
+              <a:rPr dirty="0"/>
+              <a:t> </a:t>
+            </a:r>
+            <a:r>
+              <a:rPr dirty="0" err="1"/>
+              <a:t>postgresql-contrib</a:t>
+            </a:r>
+            <a:r>
+              <a:rPr dirty="0"/>
+              <a:t> -y</a:t>
             </a:r>
           </a:p>
         </p:txBody>
@@ -4352,7 +4514,7 @@
 </file>
 
 <file path=ppt/slides/slide4.xml><?xml version="1.0" encoding="utf-8"?>
-<p:sld xmlns:a="http://schemas.openxmlformats.org/drawingml/2006/main" xmlns:p="http://schemas.openxmlformats.org/presentationml/2006/main" xmlns:r="http://schemas.openxmlformats.org/officeDocument/2006/relationships">
+<p:sld xmlns:a="http://schemas.openxmlformats.org/drawingml/2006/main" xmlns:r="http://schemas.openxmlformats.org/officeDocument/2006/relationships" xmlns:p="http://schemas.openxmlformats.org/presentationml/2006/main">
   <p:cSld>
     <p:bg>
       <p:bgPr>
@@ -4368,7 +4530,14 @@
         <p:cNvGrpSpPr/>
         <p:nvPr/>
       </p:nvGrpSpPr>
-      <p:grpSpPr/>
+      <p:grpSpPr>
+        <a:xfrm>
+          <a:off x="0" y="0"/>
+          <a:ext cx="0" cy="0"/>
+          <a:chOff x="0" y="0"/>
+          <a:chExt cx="0" cy="0"/>
+        </a:xfrm>
+      </p:grpSpPr>
       <p:sp>
         <p:nvSpPr>
           <p:cNvPr id="2" name="Rectangle 1"/>
@@ -4411,6 +4580,7 @@
           <a:lstStyle/>
           <a:p>
             <a:pPr algn="ctr"/>
+            <a:endParaRPr/>
           </a:p>
         </p:txBody>
       </p:sp>
@@ -4437,7 +4607,7 @@
           <a:lstStyle/>
           <a:p>
             <a:pPr>
-              <a:defRPr b="1" sz="1400">
+              <a:defRPr sz="1400" b="1">
                 <a:solidFill>
                   <a:srgbClr val="009688"/>
                 </a:solidFill>
@@ -4473,7 +4643,7 @@
           <a:lstStyle/>
           <a:p>
             <a:pPr>
-              <a:defRPr b="1" sz="2800">
+              <a:defRPr sz="2800" b="1">
                 <a:solidFill>
                   <a:srgbClr val="142030"/>
                 </a:solidFill>
@@ -4646,7 +4816,7 @@
 </file>
 
 <file path=ppt/slides/slide5.xml><?xml version="1.0" encoding="utf-8"?>
-<p:sld xmlns:a="http://schemas.openxmlformats.org/drawingml/2006/main" xmlns:p="http://schemas.openxmlformats.org/presentationml/2006/main" xmlns:r="http://schemas.openxmlformats.org/officeDocument/2006/relationships">
+<p:sld xmlns:a="http://schemas.openxmlformats.org/drawingml/2006/main" xmlns:r="http://schemas.openxmlformats.org/officeDocument/2006/relationships" xmlns:p="http://schemas.openxmlformats.org/presentationml/2006/main">
   <p:cSld>
     <p:bg>
       <p:bgPr>
@@ -4662,7 +4832,14 @@
         <p:cNvGrpSpPr/>
         <p:nvPr/>
       </p:nvGrpSpPr>
-      <p:grpSpPr/>
+      <p:grpSpPr>
+        <a:xfrm>
+          <a:off x="0" y="0"/>
+          <a:ext cx="0" cy="0"/>
+          <a:chOff x="0" y="0"/>
+          <a:chExt cx="0" cy="0"/>
+        </a:xfrm>
+      </p:grpSpPr>
       <p:sp>
         <p:nvSpPr>
           <p:cNvPr id="2" name="Rectangle 1"/>
@@ -4705,6 +4882,7 @@
           <a:lstStyle/>
           <a:p>
             <a:pPr algn="ctr"/>
+            <a:endParaRPr/>
           </a:p>
         </p:txBody>
       </p:sp>
@@ -4731,7 +4909,7 @@
           <a:lstStyle/>
           <a:p>
             <a:pPr>
-              <a:defRPr b="1" sz="1400">
+              <a:defRPr sz="1400" b="1">
                 <a:solidFill>
                   <a:srgbClr val="009688"/>
                 </a:solidFill>
@@ -4767,7 +4945,7 @@
           <a:lstStyle/>
           <a:p>
             <a:pPr>
-              <a:defRPr b="1" sz="2800">
+              <a:defRPr sz="2800" b="1">
                 <a:solidFill>
                   <a:srgbClr val="142030"/>
                 </a:solidFill>
@@ -4924,7 +5102,7 @@
 </file>
 
 <file path=ppt/slides/slide6.xml><?xml version="1.0" encoding="utf-8"?>
-<p:sld xmlns:a="http://schemas.openxmlformats.org/drawingml/2006/main" xmlns:p="http://schemas.openxmlformats.org/presentationml/2006/main" xmlns:r="http://schemas.openxmlformats.org/officeDocument/2006/relationships">
+<p:sld xmlns:a="http://schemas.openxmlformats.org/drawingml/2006/main" xmlns:r="http://schemas.openxmlformats.org/officeDocument/2006/relationships" xmlns:p="http://schemas.openxmlformats.org/presentationml/2006/main">
   <p:cSld>
     <p:bg>
       <p:bgPr>
@@ -4940,7 +5118,14 @@
         <p:cNvGrpSpPr/>
         <p:nvPr/>
       </p:nvGrpSpPr>
-      <p:grpSpPr/>
+      <p:grpSpPr>
+        <a:xfrm>
+          <a:off x="0" y="0"/>
+          <a:ext cx="0" cy="0"/>
+          <a:chOff x="0" y="0"/>
+          <a:chExt cx="0" cy="0"/>
+        </a:xfrm>
+      </p:grpSpPr>
       <p:sp>
         <p:nvSpPr>
           <p:cNvPr id="2" name="Rectangle 1"/>
@@ -4983,6 +5168,7 @@
           <a:lstStyle/>
           <a:p>
             <a:pPr algn="ctr"/>
+            <a:endParaRPr/>
           </a:p>
         </p:txBody>
       </p:sp>
@@ -5009,7 +5195,7 @@
           <a:lstStyle/>
           <a:p>
             <a:pPr>
-              <a:defRPr b="1" sz="1400">
+              <a:defRPr sz="1400" b="1">
                 <a:solidFill>
                   <a:srgbClr val="009688"/>
                 </a:solidFill>
@@ -5045,7 +5231,7 @@
           <a:lstStyle/>
           <a:p>
             <a:pPr>
-              <a:defRPr b="1" sz="2800">
+              <a:defRPr sz="2800" b="1">
                 <a:solidFill>
                   <a:srgbClr val="142030"/>
                 </a:solidFill>
@@ -5186,7 +5372,7 @@
 </file>
 
 <file path=ppt/slides/slide7.xml><?xml version="1.0" encoding="utf-8"?>
-<p:sld xmlns:a="http://schemas.openxmlformats.org/drawingml/2006/main" xmlns:p="http://schemas.openxmlformats.org/presentationml/2006/main" xmlns:r="http://schemas.openxmlformats.org/officeDocument/2006/relationships">
+<p:sld xmlns:a="http://schemas.openxmlformats.org/drawingml/2006/main" xmlns:r="http://schemas.openxmlformats.org/officeDocument/2006/relationships" xmlns:p="http://schemas.openxmlformats.org/presentationml/2006/main">
   <p:cSld>
     <p:bg>
       <p:bgPr>
@@ -5202,7 +5388,14 @@
         <p:cNvGrpSpPr/>
         <p:nvPr/>
       </p:nvGrpSpPr>
-      <p:grpSpPr/>
+      <p:grpSpPr>
+        <a:xfrm>
+          <a:off x="0" y="0"/>
+          <a:ext cx="0" cy="0"/>
+          <a:chOff x="0" y="0"/>
+          <a:chExt cx="0" cy="0"/>
+        </a:xfrm>
+      </p:grpSpPr>
       <p:sp>
         <p:nvSpPr>
           <p:cNvPr id="2" name="Rectangle 1"/>
@@ -5245,6 +5438,7 @@
           <a:lstStyle/>
           <a:p>
             <a:pPr algn="ctr"/>
+            <a:endParaRPr/>
           </a:p>
         </p:txBody>
       </p:sp>
@@ -5271,7 +5465,7 @@
           <a:lstStyle/>
           <a:p>
             <a:pPr>
-              <a:defRPr b="1" sz="1400">
+              <a:defRPr sz="1400" b="1">
                 <a:solidFill>
                   <a:srgbClr val="009688"/>
                 </a:solidFill>
@@ -5307,7 +5501,7 @@
           <a:lstStyle/>
           <a:p>
             <a:pPr>
-              <a:defRPr b="1" sz="2800">
+              <a:defRPr sz="2800" b="1">
                 <a:solidFill>
                   <a:srgbClr val="142030"/>
                 </a:solidFill>
@@ -5416,7 +5610,7 @@
 </file>
 
 <file path=ppt/slides/slide8.xml><?xml version="1.0" encoding="utf-8"?>
-<p:sld xmlns:a="http://schemas.openxmlformats.org/drawingml/2006/main" xmlns:p="http://schemas.openxmlformats.org/presentationml/2006/main" xmlns:r="http://schemas.openxmlformats.org/officeDocument/2006/relationships">
+<p:sld xmlns:a="http://schemas.openxmlformats.org/drawingml/2006/main" xmlns:r="http://schemas.openxmlformats.org/officeDocument/2006/relationships" xmlns:p="http://schemas.openxmlformats.org/presentationml/2006/main">
   <p:cSld>
     <p:bg>
       <p:bgPr>
@@ -5432,7 +5626,14 @@
         <p:cNvGrpSpPr/>
         <p:nvPr/>
       </p:nvGrpSpPr>
-      <p:grpSpPr/>
+      <p:grpSpPr>
+        <a:xfrm>
+          <a:off x="0" y="0"/>
+          <a:ext cx="0" cy="0"/>
+          <a:chOff x="0" y="0"/>
+          <a:chExt cx="0" cy="0"/>
+        </a:xfrm>
+      </p:grpSpPr>
       <p:sp>
         <p:nvSpPr>
           <p:cNvPr id="2" name="Rectangle 1"/>
@@ -5475,6 +5676,7 @@
           <a:lstStyle/>
           <a:p>
             <a:pPr algn="ctr"/>
+            <a:endParaRPr/>
           </a:p>
         </p:txBody>
       </p:sp>
@@ -5501,7 +5703,7 @@
           <a:lstStyle/>
           <a:p>
             <a:pPr>
-              <a:defRPr b="1" sz="1400">
+              <a:defRPr sz="1400" b="1">
                 <a:solidFill>
                   <a:srgbClr val="009688"/>
                 </a:solidFill>
@@ -5537,7 +5739,7 @@
           <a:lstStyle/>
           <a:p>
             <a:pPr>
-              <a:defRPr b="1" sz="2800">
+              <a:defRPr sz="2800" b="1">
                 <a:solidFill>
                   <a:srgbClr val="142030"/>
                 </a:solidFill>
@@ -5662,7 +5864,7 @@
 </file>
 
 <file path=ppt/slides/slide9.xml><?xml version="1.0" encoding="utf-8"?>
-<p:sld xmlns:a="http://schemas.openxmlformats.org/drawingml/2006/main" xmlns:p="http://schemas.openxmlformats.org/presentationml/2006/main" xmlns:r="http://schemas.openxmlformats.org/officeDocument/2006/relationships">
+<p:sld xmlns:a="http://schemas.openxmlformats.org/drawingml/2006/main" xmlns:r="http://schemas.openxmlformats.org/officeDocument/2006/relationships" xmlns:p="http://schemas.openxmlformats.org/presentationml/2006/main">
   <p:cSld>
     <p:bg>
       <p:bgPr>
@@ -5678,7 +5880,14 @@
         <p:cNvGrpSpPr/>
         <p:nvPr/>
       </p:nvGrpSpPr>
-      <p:grpSpPr/>
+      <p:grpSpPr>
+        <a:xfrm>
+          <a:off x="0" y="0"/>
+          <a:ext cx="0" cy="0"/>
+          <a:chOff x="0" y="0"/>
+          <a:chExt cx="0" cy="0"/>
+        </a:xfrm>
+      </p:grpSpPr>
       <p:sp>
         <p:nvSpPr>
           <p:cNvPr id="2" name="Rectangle 1"/>
@@ -5721,6 +5930,7 @@
           <a:lstStyle/>
           <a:p>
             <a:pPr algn="ctr"/>
+            <a:endParaRPr/>
           </a:p>
         </p:txBody>
       </p:sp>
@@ -5747,7 +5957,7 @@
           <a:lstStyle/>
           <a:p>
             <a:pPr>
-              <a:defRPr b="1" sz="1400">
+              <a:defRPr sz="1400" b="1">
                 <a:solidFill>
                   <a:srgbClr val="009688"/>
                 </a:solidFill>
@@ -5783,7 +5993,7 @@
           <a:lstStyle/>
           <a:p>
             <a:pPr>
-              <a:defRPr b="1" sz="2800">
+              <a:defRPr sz="2800" b="1">
                 <a:solidFill>
                   <a:srgbClr val="142030"/>
                 </a:solidFill>
